--- a/assets/hadi-bhuiyan-profile.pptx
+++ b/assets/hadi-bhuiyan-profile.pptx
@@ -8720,7 +8720,7 @@
                 <a:ea typeface="Calibri" pitchFamily="34" charset="-122"/>
                 <a:cs typeface="Calibri" pitchFamily="34" charset="-120"/>
               </a:rPr>
-              <a:t>PMP</a:t>
+              <a:t>PMP Trained</a:t>
             </a:r>
             <a:pPr indent="0" marL="0">
               <a:spcAft>
